--- a/dist/초3/과학/물질과지구/초3_과학_물질과지구_02_지구의표면과바다.pptx
+++ b/dist/초3/과학/물질과지구/초3_과학_물질과지구_02_지구의표면과바다.pptx
@@ -123,13 +123,13 @@
   <p:extLst>
     <p:ext uri="{521415D9-36F7-43E2-AB2F-B90AF26B5E84}">
       <p14:sectionLst xmlns:p14="http://schemas.microsoft.com/office/powerpoint/2010/main">
-        <p14:section name="도입" id="{8927f3bb-9a0a-0d54-5e75-9ff7e8a65c3b}">
+        <p14:section name="도입" id="{9c345b4c-776f-ab5c-b455-3c94526b704e}">
           <p14:sldIdLst>
             <p14:sldId id="256"/>
             <p14:sldId id="257"/>
           </p14:sldIdLst>
         </p14:section>
-        <p14:section name="개념" id="{2354360c-b8d7-f822-aecd-fd9ee69ad0ea}">
+        <p14:section name="개념" id="{64404a84-d331-1025-1de6-7b4ad9fb8140}">
           <p14:sldIdLst>
             <p14:sldId id="258"/>
             <p14:sldId id="261"/>
@@ -137,7 +137,7 @@
             <p14:sldId id="266"/>
           </p14:sldIdLst>
         </p14:section>
-        <p14:section name="연습" id="{1a59cb31-0c4b-0e5b-3fd8-d327f6c38ab3}">
+        <p14:section name="연습" id="{21934140-4d75-0496-bed5-dcabba2491ac}">
           <p14:sldIdLst>
             <p14:sldId id="259"/>
             <p14:sldId id="260"/>
@@ -147,31 +147,31 @@
             <p14:sldId id="267"/>
           </p14:sldIdLst>
         </p14:section>
-        <p14:section name="개념" id="{cf452383-f504-f091-091c-b95a926e7e7d}">
+        <p14:section name="개념" id="{e210eb9e-f346-3c42-9f85-a0a2bb846640}">
           <p14:sldIdLst/>
         </p14:section>
-        <p14:section name="연습" id="{42e2b745-514b-e606-6a05-1a8d5c82e27d}">
+        <p14:section name="연습" id="{f608160c-8168-5668-50ad-9238c26f6559}">
           <p14:sldIdLst/>
         </p14:section>
-        <p14:section name="개념" id="{a51f2814-45dc-1ef9-2842-33ed1ca609c7}">
+        <p14:section name="개념" id="{2d4c689a-c776-48aa-df6a-9bab6abaabac}">
           <p14:sldIdLst/>
         </p14:section>
-        <p14:section name="연습" id="{14957b57-69eb-8ada-c1ef-b07a68be259d}">
+        <p14:section name="연습" id="{e5315119-0b57-7531-b2f0-dd153a1b03c5}">
           <p14:sldIdLst/>
         </p14:section>
-        <p14:section name="확인" id="{cdb7c834-fd26-ef6e-b62f-669a656b8c3d}">
+        <p14:section name="확인" id="{8ce6580b-222b-cf3f-363c-8e5ac8c8e5c3}">
           <p14:sldIdLst>
             <p14:sldId id="268"/>
             <p14:sldId id="269"/>
             <p14:sldId id="270"/>
           </p14:sldIdLst>
         </p14:section>
-        <p14:section name="정리" id="{b7cb7749-1bb5-8a9e-be6c-d59e681d493e}">
+        <p14:section name="정리" id="{7007ce08-128d-9a9f-0e81-8d93ac23941a}">
           <p14:sldIdLst>
             <p14:sldId id="271"/>
           </p14:sldIdLst>
         </p14:section>
-        <p14:section name="보충" id="{a099c339-5bc4-3fc2-05dc-96362f60f4b2}">
+        <p14:section name="보충" id="{4d444935-a060-e89d-6553-18ce7c045300}">
           <p14:sldIdLst>
             <p14:sldId id="272"/>
           </p14:sldIdLst>
